--- a/presentation/Tow_Factory_CompanyWebsite_Design.pptx
+++ b/presentation/Tow_Factory_CompanyWebsite_Design.pptx
@@ -615,18 +615,6 @@
   <p:clrMapOvr>
     <a:masterClrMapping/>
   </p:clrMapOvr>
-  <mc:AlternateContent xmlns:mc="http://schemas.openxmlformats.org/markup-compatibility/2006">
-    <mc:Choice xmlns:p14="http://schemas.microsoft.com/office/powerpoint/2010/main" Requires="p14">
-      <p:transition spd="slow" p14:dur="1300">
-        <p14:pan dir="u"/>
-      </p:transition>
-    </mc:Choice>
-    <mc:Fallback>
-      <p:transition spd="slow">
-        <p:fade/>
-      </p:transition>
-    </mc:Fallback>
-  </mc:AlternateContent>
 </p:sld>
 </file>
 
@@ -687,13 +675,13 @@
   <p:clrMapOvr>
     <a:masterClrMapping/>
   </p:clrMapOvr>
-  <mc:AlternateContent xmlns:mc="http://schemas.openxmlformats.org/markup-compatibility/2006">
-    <mc:Choice xmlns:p14="http://schemas.microsoft.com/office/powerpoint/2010/main" Requires="p14">
+  <mc:AlternateContent xmlns:mc="http://schemas.openxmlformats.org/markup-compatibility/2006" xmlns:p14="http://schemas.microsoft.com/office/powerpoint/2010/main">
+    <mc:Choice Requires="p14">
       <p:transition spd="slow" p14:dur="1300">
         <p14:pan dir="u"/>
       </p:transition>
     </mc:Choice>
-    <mc:Fallback>
+    <mc:Fallback xmlns="">
       <p:transition spd="slow">
         <p:fade/>
       </p:transition>
@@ -759,13 +747,13 @@
   <p:clrMapOvr>
     <a:masterClrMapping/>
   </p:clrMapOvr>
-  <mc:AlternateContent xmlns:mc="http://schemas.openxmlformats.org/markup-compatibility/2006">
-    <mc:Choice xmlns:p14="http://schemas.microsoft.com/office/powerpoint/2010/main" Requires="p14">
+  <mc:AlternateContent xmlns:mc="http://schemas.openxmlformats.org/markup-compatibility/2006" xmlns:p14="http://schemas.microsoft.com/office/powerpoint/2010/main">
+    <mc:Choice Requires="p14">
       <p:transition spd="slow" p14:dur="1300">
         <p14:pan dir="u"/>
       </p:transition>
     </mc:Choice>
-    <mc:Fallback>
+    <mc:Fallback xmlns="">
       <p:transition spd="slow">
         <p:fade/>
       </p:transition>
@@ -831,13 +819,13 @@
   <p:clrMapOvr>
     <a:masterClrMapping/>
   </p:clrMapOvr>
-  <mc:AlternateContent xmlns:mc="http://schemas.openxmlformats.org/markup-compatibility/2006">
-    <mc:Choice xmlns:p14="http://schemas.microsoft.com/office/powerpoint/2010/main" Requires="p14">
+  <mc:AlternateContent xmlns:mc="http://schemas.openxmlformats.org/markup-compatibility/2006" xmlns:p14="http://schemas.microsoft.com/office/powerpoint/2010/main">
+    <mc:Choice Requires="p14">
       <p:transition spd="slow" p14:dur="1300">
         <p14:pan dir="u"/>
       </p:transition>
     </mc:Choice>
-    <mc:Fallback>
+    <mc:Fallback xmlns="">
       <p:transition spd="slow">
         <p:fade/>
       </p:transition>
@@ -903,13 +891,13 @@
   <p:clrMapOvr>
     <a:masterClrMapping/>
   </p:clrMapOvr>
-  <mc:AlternateContent xmlns:mc="http://schemas.openxmlformats.org/markup-compatibility/2006">
-    <mc:Choice xmlns:p14="http://schemas.microsoft.com/office/powerpoint/2010/main" Requires="p14">
+  <mc:AlternateContent xmlns:mc="http://schemas.openxmlformats.org/markup-compatibility/2006" xmlns:p14="http://schemas.microsoft.com/office/powerpoint/2010/main">
+    <mc:Choice Requires="p14">
       <p:transition spd="slow" p14:dur="1300">
         <p14:pan dir="u"/>
       </p:transition>
     </mc:Choice>
-    <mc:Fallback>
+    <mc:Fallback xmlns="">
       <p:transition spd="slow">
         <p:fade/>
       </p:transition>
@@ -975,13 +963,13 @@
   <p:clrMapOvr>
     <a:masterClrMapping/>
   </p:clrMapOvr>
-  <mc:AlternateContent xmlns:mc="http://schemas.openxmlformats.org/markup-compatibility/2006">
-    <mc:Choice xmlns:p14="http://schemas.microsoft.com/office/powerpoint/2010/main" Requires="p14">
+  <mc:AlternateContent xmlns:mc="http://schemas.openxmlformats.org/markup-compatibility/2006" xmlns:p14="http://schemas.microsoft.com/office/powerpoint/2010/main">
+    <mc:Choice Requires="p14">
       <p:transition spd="slow" p14:dur="1300">
         <p14:pan dir="u"/>
       </p:transition>
     </mc:Choice>
-    <mc:Fallback>
+    <mc:Fallback xmlns="">
       <p:transition spd="slow">
         <p:fade/>
       </p:transition>
@@ -1047,13 +1035,13 @@
   <p:clrMapOvr>
     <a:masterClrMapping/>
   </p:clrMapOvr>
-  <mc:AlternateContent xmlns:mc="http://schemas.openxmlformats.org/markup-compatibility/2006">
-    <mc:Choice xmlns:p14="http://schemas.microsoft.com/office/powerpoint/2010/main" Requires="p14">
+  <mc:AlternateContent xmlns:mc="http://schemas.openxmlformats.org/markup-compatibility/2006" xmlns:p14="http://schemas.microsoft.com/office/powerpoint/2010/main">
+    <mc:Choice Requires="p14">
       <p:transition spd="slow" p14:dur="1300">
         <p14:pan dir="u"/>
       </p:transition>
     </mc:Choice>
-    <mc:Fallback>
+    <mc:Fallback xmlns="">
       <p:transition spd="slow">
         <p:fade/>
       </p:transition>
@@ -1119,13 +1107,13 @@
   <p:clrMapOvr>
     <a:masterClrMapping/>
   </p:clrMapOvr>
-  <mc:AlternateContent xmlns:mc="http://schemas.openxmlformats.org/markup-compatibility/2006">
-    <mc:Choice xmlns:p14="http://schemas.microsoft.com/office/powerpoint/2010/main" Requires="p14">
+  <mc:AlternateContent xmlns:mc="http://schemas.openxmlformats.org/markup-compatibility/2006" xmlns:p14="http://schemas.microsoft.com/office/powerpoint/2010/main">
+    <mc:Choice Requires="p14">
       <p:transition spd="slow" p14:dur="1300">
         <p14:pan dir="u"/>
       </p:transition>
     </mc:Choice>
-    <mc:Fallback>
+    <mc:Fallback xmlns="">
       <p:transition spd="slow">
         <p:fade/>
       </p:transition>
@@ -1191,13 +1179,13 @@
   <p:clrMapOvr>
     <a:masterClrMapping/>
   </p:clrMapOvr>
-  <mc:AlternateContent xmlns:mc="http://schemas.openxmlformats.org/markup-compatibility/2006">
-    <mc:Choice xmlns:p14="http://schemas.microsoft.com/office/powerpoint/2010/main" Requires="p14">
+  <mc:AlternateContent xmlns:mc="http://schemas.openxmlformats.org/markup-compatibility/2006" xmlns:p14="http://schemas.microsoft.com/office/powerpoint/2010/main">
+    <mc:Choice Requires="p14">
       <p:transition spd="slow" p14:dur="1300">
         <p14:pan dir="u"/>
       </p:transition>
     </mc:Choice>
-    <mc:Fallback>
+    <mc:Fallback xmlns="">
       <p:transition spd="slow">
         <p:fade/>
       </p:transition>
@@ -1263,13 +1251,13 @@
   <p:clrMapOvr>
     <a:masterClrMapping/>
   </p:clrMapOvr>
-  <mc:AlternateContent xmlns:mc="http://schemas.openxmlformats.org/markup-compatibility/2006">
-    <mc:Choice xmlns:p14="http://schemas.microsoft.com/office/powerpoint/2010/main" Requires="p14">
+  <mc:AlternateContent xmlns:mc="http://schemas.openxmlformats.org/markup-compatibility/2006" xmlns:p14="http://schemas.microsoft.com/office/powerpoint/2010/main">
+    <mc:Choice Requires="p14">
       <p:transition spd="slow" p14:dur="1300">
         <p14:pan dir="u"/>
       </p:transition>
     </mc:Choice>
-    <mc:Fallback>
+    <mc:Fallback xmlns="">
       <p:transition spd="slow">
         <p:fade/>
       </p:transition>
